--- a/ゲーム科2年/00_前期/ゲーム開発Ⅰ/09_デバッグカメラ課題.pptx
+++ b/ゲーム科2年/00_前期/ゲーム開発Ⅰ/09_デバッグカメラ課題.pptx
@@ -262,7 +262,7 @@
           <a:p>
             <a:fld id="{E9CC885B-4903-4D54-9A93-00025F12DED9}" type="datetimeFigureOut">
               <a:rPr kumimoji="1" lang="ja-JP" altLang="en-US" smtClean="0"/>
-              <a:t>2026/2/5</a:t>
+              <a:t>2026/2/6</a:t>
             </a:fld>
             <a:endParaRPr kumimoji="1" lang="ja-JP" altLang="en-US"/>
           </a:p>
@@ -492,7 +492,7 @@
           <a:p>
             <a:fld id="{E9CC885B-4903-4D54-9A93-00025F12DED9}" type="datetimeFigureOut">
               <a:rPr kumimoji="1" lang="ja-JP" altLang="en-US" smtClean="0"/>
-              <a:t>2026/2/5</a:t>
+              <a:t>2026/2/6</a:t>
             </a:fld>
             <a:endParaRPr kumimoji="1" lang="ja-JP" altLang="en-US"/>
           </a:p>
@@ -732,7 +732,7 @@
           <a:p>
             <a:fld id="{E9CC885B-4903-4D54-9A93-00025F12DED9}" type="datetimeFigureOut">
               <a:rPr kumimoji="1" lang="ja-JP" altLang="en-US" smtClean="0"/>
-              <a:t>2026/2/5</a:t>
+              <a:t>2026/2/6</a:t>
             </a:fld>
             <a:endParaRPr kumimoji="1" lang="ja-JP" altLang="en-US"/>
           </a:p>
@@ -962,7 +962,7 @@
           <a:p>
             <a:fld id="{E9CC885B-4903-4D54-9A93-00025F12DED9}" type="datetimeFigureOut">
               <a:rPr kumimoji="1" lang="ja-JP" altLang="en-US" smtClean="0"/>
-              <a:t>2026/2/5</a:t>
+              <a:t>2026/2/6</a:t>
             </a:fld>
             <a:endParaRPr kumimoji="1" lang="ja-JP" altLang="en-US"/>
           </a:p>
@@ -1237,7 +1237,7 @@
           <a:p>
             <a:fld id="{E9CC885B-4903-4D54-9A93-00025F12DED9}" type="datetimeFigureOut">
               <a:rPr kumimoji="1" lang="ja-JP" altLang="en-US" smtClean="0"/>
-              <a:t>2026/2/5</a:t>
+              <a:t>2026/2/6</a:t>
             </a:fld>
             <a:endParaRPr kumimoji="1" lang="ja-JP" altLang="en-US"/>
           </a:p>
@@ -1566,7 +1566,7 @@
           <a:p>
             <a:fld id="{E9CC885B-4903-4D54-9A93-00025F12DED9}" type="datetimeFigureOut">
               <a:rPr kumimoji="1" lang="ja-JP" altLang="en-US" smtClean="0"/>
-              <a:t>2026/2/5</a:t>
+              <a:t>2026/2/6</a:t>
             </a:fld>
             <a:endParaRPr kumimoji="1" lang="ja-JP" altLang="en-US"/>
           </a:p>
@@ -2042,7 +2042,7 @@
           <a:p>
             <a:fld id="{E9CC885B-4903-4D54-9A93-00025F12DED9}" type="datetimeFigureOut">
               <a:rPr kumimoji="1" lang="ja-JP" altLang="en-US" smtClean="0"/>
-              <a:t>2026/2/5</a:t>
+              <a:t>2026/2/6</a:t>
             </a:fld>
             <a:endParaRPr kumimoji="1" lang="ja-JP" altLang="en-US"/>
           </a:p>
@@ -2183,7 +2183,7 @@
           <a:p>
             <a:fld id="{E9CC885B-4903-4D54-9A93-00025F12DED9}" type="datetimeFigureOut">
               <a:rPr kumimoji="1" lang="ja-JP" altLang="en-US" smtClean="0"/>
-              <a:t>2026/2/5</a:t>
+              <a:t>2026/2/6</a:t>
             </a:fld>
             <a:endParaRPr kumimoji="1" lang="ja-JP" altLang="en-US"/>
           </a:p>
@@ -2296,7 +2296,7 @@
           <a:p>
             <a:fld id="{E9CC885B-4903-4D54-9A93-00025F12DED9}" type="datetimeFigureOut">
               <a:rPr kumimoji="1" lang="ja-JP" altLang="en-US" smtClean="0"/>
-              <a:t>2026/2/5</a:t>
+              <a:t>2026/2/6</a:t>
             </a:fld>
             <a:endParaRPr kumimoji="1" lang="ja-JP" altLang="en-US"/>
           </a:p>
@@ -2639,7 +2639,7 @@
           <a:p>
             <a:fld id="{E9CC885B-4903-4D54-9A93-00025F12DED9}" type="datetimeFigureOut">
               <a:rPr kumimoji="1" lang="ja-JP" altLang="en-US" smtClean="0"/>
-              <a:t>2026/2/5</a:t>
+              <a:t>2026/2/6</a:t>
             </a:fld>
             <a:endParaRPr kumimoji="1" lang="ja-JP" altLang="en-US"/>
           </a:p>
@@ -2927,7 +2927,7 @@
           <a:p>
             <a:fld id="{E9CC885B-4903-4D54-9A93-00025F12DED9}" type="datetimeFigureOut">
               <a:rPr kumimoji="1" lang="ja-JP" altLang="en-US" smtClean="0"/>
-              <a:t>2026/2/5</a:t>
+              <a:t>2026/2/6</a:t>
             </a:fld>
             <a:endParaRPr kumimoji="1" lang="ja-JP" altLang="en-US"/>
           </a:p>
@@ -3200,7 +3200,7 @@
           <a:p>
             <a:fld id="{E9CC885B-4903-4D54-9A93-00025F12DED9}" type="datetimeFigureOut">
               <a:rPr kumimoji="1" lang="ja-JP" altLang="en-US" smtClean="0"/>
-              <a:t>2026/2/5</a:t>
+              <a:t>2026/2/6</a:t>
             </a:fld>
             <a:endParaRPr kumimoji="1" lang="ja-JP" altLang="en-US"/>
           </a:p>
@@ -4391,7 +4391,7 @@
           <a:p>
             <a:r>
               <a:rPr lang="ja-JP" altLang="en-US" sz="2400" dirty="0"/>
-              <a:t>市販のゲームのようにカメラの回転は未実装で良いです。</a:t>
+              <a:t>市販のゲームのようなカメラの回転は未実装で良いです。</a:t>
             </a:r>
             <a:endParaRPr lang="en-US" altLang="ja-JP" sz="2400" dirty="0"/>
           </a:p>

--- a/ゲーム科2年/00_前期/ゲーム開発Ⅰ/09_デバッグカメラ課題.pptx
+++ b/ゲーム科2年/00_前期/ゲーム開発Ⅰ/09_デバッグカメラ課題.pptx
@@ -262,7 +262,7 @@
           <a:p>
             <a:fld id="{E9CC885B-4903-4D54-9A93-00025F12DED9}" type="datetimeFigureOut">
               <a:rPr kumimoji="1" lang="ja-JP" altLang="en-US" smtClean="0"/>
-              <a:t>2026/2/6</a:t>
+              <a:t>2026/2/25</a:t>
             </a:fld>
             <a:endParaRPr kumimoji="1" lang="ja-JP" altLang="en-US"/>
           </a:p>
@@ -492,7 +492,7 @@
           <a:p>
             <a:fld id="{E9CC885B-4903-4D54-9A93-00025F12DED9}" type="datetimeFigureOut">
               <a:rPr kumimoji="1" lang="ja-JP" altLang="en-US" smtClean="0"/>
-              <a:t>2026/2/6</a:t>
+              <a:t>2026/2/25</a:t>
             </a:fld>
             <a:endParaRPr kumimoji="1" lang="ja-JP" altLang="en-US"/>
           </a:p>
@@ -732,7 +732,7 @@
           <a:p>
             <a:fld id="{E9CC885B-4903-4D54-9A93-00025F12DED9}" type="datetimeFigureOut">
               <a:rPr kumimoji="1" lang="ja-JP" altLang="en-US" smtClean="0"/>
-              <a:t>2026/2/6</a:t>
+              <a:t>2026/2/25</a:t>
             </a:fld>
             <a:endParaRPr kumimoji="1" lang="ja-JP" altLang="en-US"/>
           </a:p>
@@ -962,7 +962,7 @@
           <a:p>
             <a:fld id="{E9CC885B-4903-4D54-9A93-00025F12DED9}" type="datetimeFigureOut">
               <a:rPr kumimoji="1" lang="ja-JP" altLang="en-US" smtClean="0"/>
-              <a:t>2026/2/6</a:t>
+              <a:t>2026/2/25</a:t>
             </a:fld>
             <a:endParaRPr kumimoji="1" lang="ja-JP" altLang="en-US"/>
           </a:p>
@@ -1237,7 +1237,7 @@
           <a:p>
             <a:fld id="{E9CC885B-4903-4D54-9A93-00025F12DED9}" type="datetimeFigureOut">
               <a:rPr kumimoji="1" lang="ja-JP" altLang="en-US" smtClean="0"/>
-              <a:t>2026/2/6</a:t>
+              <a:t>2026/2/25</a:t>
             </a:fld>
             <a:endParaRPr kumimoji="1" lang="ja-JP" altLang="en-US"/>
           </a:p>
@@ -1566,7 +1566,7 @@
           <a:p>
             <a:fld id="{E9CC885B-4903-4D54-9A93-00025F12DED9}" type="datetimeFigureOut">
               <a:rPr kumimoji="1" lang="ja-JP" altLang="en-US" smtClean="0"/>
-              <a:t>2026/2/6</a:t>
+              <a:t>2026/2/25</a:t>
             </a:fld>
             <a:endParaRPr kumimoji="1" lang="ja-JP" altLang="en-US"/>
           </a:p>
@@ -2042,7 +2042,7 @@
           <a:p>
             <a:fld id="{E9CC885B-4903-4D54-9A93-00025F12DED9}" type="datetimeFigureOut">
               <a:rPr kumimoji="1" lang="ja-JP" altLang="en-US" smtClean="0"/>
-              <a:t>2026/2/6</a:t>
+              <a:t>2026/2/25</a:t>
             </a:fld>
             <a:endParaRPr kumimoji="1" lang="ja-JP" altLang="en-US"/>
           </a:p>
@@ -2183,7 +2183,7 @@
           <a:p>
             <a:fld id="{E9CC885B-4903-4D54-9A93-00025F12DED9}" type="datetimeFigureOut">
               <a:rPr kumimoji="1" lang="ja-JP" altLang="en-US" smtClean="0"/>
-              <a:t>2026/2/6</a:t>
+              <a:t>2026/2/25</a:t>
             </a:fld>
             <a:endParaRPr kumimoji="1" lang="ja-JP" altLang="en-US"/>
           </a:p>
@@ -2296,7 +2296,7 @@
           <a:p>
             <a:fld id="{E9CC885B-4903-4D54-9A93-00025F12DED9}" type="datetimeFigureOut">
               <a:rPr kumimoji="1" lang="ja-JP" altLang="en-US" smtClean="0"/>
-              <a:t>2026/2/6</a:t>
+              <a:t>2026/2/25</a:t>
             </a:fld>
             <a:endParaRPr kumimoji="1" lang="ja-JP" altLang="en-US"/>
           </a:p>
@@ -2639,7 +2639,7 @@
           <a:p>
             <a:fld id="{E9CC885B-4903-4D54-9A93-00025F12DED9}" type="datetimeFigureOut">
               <a:rPr kumimoji="1" lang="ja-JP" altLang="en-US" smtClean="0"/>
-              <a:t>2026/2/6</a:t>
+              <a:t>2026/2/25</a:t>
             </a:fld>
             <a:endParaRPr kumimoji="1" lang="ja-JP" altLang="en-US"/>
           </a:p>
@@ -2927,7 +2927,7 @@
           <a:p>
             <a:fld id="{E9CC885B-4903-4D54-9A93-00025F12DED9}" type="datetimeFigureOut">
               <a:rPr kumimoji="1" lang="ja-JP" altLang="en-US" smtClean="0"/>
-              <a:t>2026/2/6</a:t>
+              <a:t>2026/2/25</a:t>
             </a:fld>
             <a:endParaRPr kumimoji="1" lang="ja-JP" altLang="en-US"/>
           </a:p>
@@ -3200,7 +3200,7 @@
           <a:p>
             <a:fld id="{E9CC885B-4903-4D54-9A93-00025F12DED9}" type="datetimeFigureOut">
               <a:rPr kumimoji="1" lang="ja-JP" altLang="en-US" smtClean="0"/>
-              <a:t>2026/2/6</a:t>
+              <a:t>2026/2/25</a:t>
             </a:fld>
             <a:endParaRPr kumimoji="1" lang="ja-JP" altLang="en-US"/>
           </a:p>
@@ -3893,15 +3893,7 @@
           <a:p>
             <a:r>
               <a:rPr lang="ja-JP" altLang="en-US" sz="2400" dirty="0"/>
-              <a:t>・</a:t>
-            </a:r>
-            <a:r>
-              <a:rPr lang="en-US" altLang="ja-JP" sz="2400" dirty="0"/>
-              <a:t>WASD</a:t>
-            </a:r>
-            <a:r>
-              <a:rPr lang="ja-JP" altLang="en-US" sz="2400" dirty="0"/>
-              <a:t>で上下左右移動</a:t>
+              <a:t>・カーソルキーで上下左右移動</a:t>
             </a:r>
             <a:endParaRPr lang="en-US" altLang="ja-JP" sz="2400" dirty="0"/>
           </a:p>
@@ -3923,7 +3915,7 @@
               <a:t>X</a:t>
             </a:r>
             <a:r>
-              <a:rPr lang="ja-JP" altLang="en-US" sz="2400"/>
+              <a:rPr lang="ja-JP" altLang="en-US" sz="2400" dirty="0"/>
               <a:t>キーで後退</a:t>
             </a:r>
             <a:endParaRPr lang="en-US" altLang="ja-JP" sz="2400" dirty="0"/>
@@ -4043,7 +4035,7 @@
         <p:spPr>
           <a:xfrm>
             <a:off x="567542" y="1216429"/>
-            <a:ext cx="11572399" cy="5262979"/>
+            <a:ext cx="9680855" cy="5262979"/>
           </a:xfrm>
           <a:prstGeom prst="rect">
             <a:avLst/>
@@ -4242,7 +4234,7 @@
             </a:r>
             <a:r>
               <a:rPr lang="ja-JP" altLang="en-US" sz="2400" dirty="0"/>
-              <a:t>の処理が結構使いまわせるので、</a:t>
+              <a:t>の処理がかなり使いまわせるので、</a:t>
             </a:r>
             <a:endParaRPr lang="en-US" altLang="ja-JP" sz="2400" dirty="0"/>
           </a:p>
@@ -4273,23 +4265,19 @@
           </a:p>
           <a:p>
             <a:r>
+              <a:rPr lang="en-US" altLang="ja-JP" sz="2400" dirty="0"/>
+              <a:t>public</a:t>
+            </a:r>
+            <a:r>
               <a:rPr lang="ja-JP" altLang="en-US" sz="2400" dirty="0"/>
-              <a:t>ほしい変数を持っているクラスに、値を</a:t>
-            </a:r>
-            <a:r>
-              <a:rPr lang="ja-JP" altLang="en-US" sz="2400"/>
-              <a:t>取得する</a:t>
-            </a:r>
+              <a:t>の関数を使って、必要な情報が得られるようにしましょう。</a:t>
+            </a:r>
+            <a:endParaRPr lang="en-US" altLang="ja-JP" sz="2400" dirty="0"/>
+          </a:p>
+          <a:p>
             <a:r>
               <a:rPr lang="ja-JP" altLang="en-US" sz="2400" dirty="0"/>
-              <a:t>関数を作りましょう。</a:t>
-            </a:r>
-            <a:endParaRPr lang="en-US" altLang="ja-JP" sz="2400" dirty="0"/>
-          </a:p>
-          <a:p>
-            <a:r>
-              <a:rPr lang="ja-JP" altLang="en-US" sz="2400" dirty="0"/>
-              <a:t>（アクセサ、ゲッター、セッターと呼ばれますのでわからなければ調べましょう）</a:t>
+              <a:t>難しいですので、わからない場合は先生に聞きましょう。</a:t>
             </a:r>
             <a:endParaRPr lang="en-US" altLang="ja-JP" sz="2400" dirty="0"/>
           </a:p>
